--- a/challenge_archived/togo-formation-emploi/rapport/Soutenance_Methode.pptx
+++ b/challenge_archived/togo-formation-emploi/rapport/Soutenance_Methode.pptx
@@ -612,6 +612,16 @@
           <a:p>
             <a:r>
               <a:t>L'élasticité vaut moins zéro virgule quatre-vingt-six : quand l'accès augmente d'un pour cent, la dépense par étudiant recule de presque un pour cent. R carré de zéro virgule quatre-vingt-trois, p-value sous un pour mille.</a:t>
+            </a:r>
+          </a:p>
+          <a:p>
+            <a:r>
+              <a:t>Un mot sur ce que cela VEUT DIRE, parce que c'est là qu'est l'argument. La dépense par étudiant, c'est un budget divisé par un nombre d'étudiants. Une élasticité de moins zéro virgule quatre-vingt-six, presque moins un, dit que le dénominateur a explosé pendant que le numérateur bougeait à peine. Le pays a multiplié ses étudiants sans multiplier l'argent. Ce n'est pas une corrélation mystérieuse, c'est arithmétique.</a:t>
+            </a:r>
+          </a:p>
+          <a:p>
+            <a:r>
+              <a:t>Si on m'objecte « corrélation n'est pas causalité », la réponse est là : le lien est mécanique, les deux grandeurs partagent leur dénominateur. Je ne prétends pas que l'accès CAUSE la baisse ; je constate que l'argent n'a pas suivi le nombre.</a:t>
             </a:r>
           </a:p>
           <a:p>
@@ -5056,7 +5066,7 @@
                 </a:solidFill>
                 <a:latin typeface="Calibri"/>
               </a:rPr>
-              <a:t>Accès et dépense, depuis 1998</a:t>
+              <a:t>Accès et dépense, base 100 en 1998</a:t>
             </a:r>
           </a:p>
           <a:p>
@@ -5088,7 +5098,7 @@
                 </a:solidFill>
                 <a:latin typeface="Calibri"/>
               </a:rPr>
-              <a:t>l'accès quadruple, la dépense par étudiant s'effondre</a:t>
+              <a:t>accès jusqu'en 2020, dépense jusqu'en 2017 — le calcul de l'élasticité, lui, ne porte que sur leurs 10 années communes</a:t>
             </a:r>
           </a:p>
         </p:txBody>
@@ -5214,7 +5224,7 @@
                 </a:solidFill>
                 <a:latin typeface="Calibri"/>
               </a:rPr>
-              <a:t>L'effet ciseaux tient-il statistiquement ?</a:t>
+              <a:t>log(dépense/étudiant) contre log(accès), 10 années</a:t>
             </a:r>
           </a:p>
           <a:p>
@@ -5301,7 +5311,7 @@
                 </a:solidFill>
                 <a:latin typeface="Calibri"/>
               </a:rPr>
-              <a:t>Le taux d'exécution baisse-t-il quand l'enveloppe monte ?</a:t>
+              <a:t>taux d'exécution contre montant voté, 6 années</a:t>
             </a:r>
           </a:p>
           <a:p>
